--- a/Kavli Winton Poster.pptx
+++ b/Kavli Winton Poster.pptx
@@ -257,7 +257,7 @@
       </p15:sldGuideLst>
     </p:ext>
     <p:ext uri="GoogleSlidesCustomDataVersion2">
-      <go:slidesCustomData xmlns:go="http://customooxmlschemas.google.com/" xmlns:ahyp="http://schemas.microsoft.com/office/drawing/2018/hyperlinkcolor" xmlns:p15="http://schemas.microsoft.com/office/powerpoint/2012/main" xmlns:p14="http://schemas.microsoft.com/office/powerpoint/2010/main" xmlns:com="http://schemas.openxmlformats.org/drawingml/2006/compatibility" xmlns:pvml="urn:schemas-microsoft-com:office:powerpoint" xmlns:v="urn:schemas-microsoft-com:vml" xmlns:o="urn:schemas-microsoft-com:office:office" xmlns:dgm="http://schemas.openxmlformats.org/drawingml/2006/diagram" xmlns:c="http://schemas.openxmlformats.org/drawingml/2006/chart" xmlns:mv="urn:schemas-microsoft-com:mac:vml" xmlns:mc="http://schemas.openxmlformats.org/markup-compatibility/2006" xmlns="" r:id="rId7" roundtripDataSignature="AMtx7mjmSQEt/ItDfnY7DvGW+KefM98C5A=="/>
+      <go:slidesCustomData xmlns="" xmlns:mc="http://schemas.openxmlformats.org/markup-compatibility/2006" xmlns:mv="urn:schemas-microsoft-com:mac:vml" xmlns:c="http://schemas.openxmlformats.org/drawingml/2006/chart" xmlns:dgm="http://schemas.openxmlformats.org/drawingml/2006/diagram" xmlns:o="urn:schemas-microsoft-com:office:office" xmlns:v="urn:schemas-microsoft-com:vml" xmlns:pvml="urn:schemas-microsoft-com:office:powerpoint" xmlns:com="http://schemas.openxmlformats.org/drawingml/2006/compatibility" xmlns:p14="http://schemas.microsoft.com/office/powerpoint/2010/main" xmlns:p15="http://schemas.microsoft.com/office/powerpoint/2012/main" xmlns:ahyp="http://schemas.microsoft.com/office/drawing/2018/hyperlinkcolor" xmlns:go="http://customooxmlschemas.google.com/" r:id="rId7" roundtripDataSignature="AMtx7mjmSQEt/ItDfnY7DvGW+KefM98C5A=="/>
     </p:ext>
   </p:extLst>
 </p:presentation>
@@ -12027,8 +12027,8 @@
           </a:p>
         </p:txBody>
       </p:sp>
-      <mc:AlternateContent xmlns:mc="http://schemas.openxmlformats.org/markup-compatibility/2006" xmlns:a14="http://schemas.microsoft.com/office/drawing/2010/main">
-        <mc:Choice Requires="a14">
+      <mc:AlternateContent xmlns:mc="http://schemas.openxmlformats.org/markup-compatibility/2006">
+        <mc:Choice xmlns:a14="http://schemas.microsoft.com/office/drawing/2010/main" Requires="a14">
           <p:sp>
             <p:nvSpPr>
               <p:cNvPr id="3" name="TextBox 2">
@@ -12044,7 +12044,7 @@
             <p:spPr>
               <a:xfrm>
                 <a:off x="94511" y="2541225"/>
-                <a:ext cx="4484154" cy="6907340"/>
+                <a:ext cx="4484154" cy="7315200"/>
               </a:xfrm>
               <a:prstGeom prst="rect">
                 <a:avLst/>
@@ -13852,7 +13852,7 @@
             </p:txBody>
           </p:sp>
         </mc:Choice>
-        <mc:Fallback xmlns="">
+        <mc:Fallback>
           <p:sp>
             <p:nvSpPr>
               <p:cNvPr id="3" name="TextBox 2">
@@ -13870,7 +13870,7 @@
             <p:spPr>
               <a:xfrm>
                 <a:off x="94511" y="2541225"/>
-                <a:ext cx="4484154" cy="6907340"/>
+                <a:ext cx="4484154" cy="7315200"/>
               </a:xfrm>
               <a:prstGeom prst="rect">
                 <a:avLst/>
@@ -13878,7 +13878,7 @@
               <a:blipFill>
                 <a:blip r:embed="rId8"/>
                 <a:stretch>
-                  <a:fillRect t="-2990" r="-271" b="-7212"/>
+                  <a:fillRect t="-2763" b="-1036"/>
                 </a:stretch>
               </a:blipFill>
               <a:ln>
@@ -15502,8 +15502,8 @@
             </p:nvSpPr>
             <p:spPr>
               <a:xfrm>
-                <a:off x="9737766" y="2542031"/>
-                <a:ext cx="4567936" cy="5719001"/>
+                <a:off x="9737766" y="2542030"/>
+                <a:ext cx="4567936" cy="7315200"/>
               </a:xfrm>
               <a:prstGeom prst="rect">
                 <a:avLst/>
@@ -16455,6 +16455,98 @@
                   <a:t> exponent applies to other integrable systems displaying superdiffusion, we generalize the Heisenberg ladder by increasing the local Hilbert space dimension to 3 and suitably convert exchange terms to permutation terms. We verify that the same behavior occurs, indicating its universality.</a:t>
                 </a:r>
               </a:p>
+              <a:p>
+                <a:pPr lvl="0">
+                  <a:defRPr/>
+                </a:pPr>
+                <a:endParaRPr lang="en-US" sz="1200" dirty="0">
+                  <a:solidFill>
+                    <a:schemeClr val="tx1"/>
+                  </a:solidFill>
+                  <a:latin typeface="Cambria" panose="02040503050406030204" pitchFamily="18" charset="0"/>
+                  <a:ea typeface="Cambria" panose="02040503050406030204" pitchFamily="18" charset="0"/>
+                  <a:cs typeface="Calibri" panose="020F0502020204030204" pitchFamily="34" charset="0"/>
+                </a:endParaRPr>
+              </a:p>
+              <a:p>
+                <a:pPr marL="0" marR="0" lvl="0" indent="0" algn="ctr" defTabSz="914400" rtl="0" eaLnBrk="1" fontAlgn="auto" latinLnBrk="0" hangingPunct="1">
+                  <a:lnSpc>
+                    <a:spcPct val="100000"/>
+                  </a:lnSpc>
+                  <a:spcBef>
+                    <a:spcPts val="0"/>
+                  </a:spcBef>
+                  <a:spcAft>
+                    <a:spcPts val="0"/>
+                  </a:spcAft>
+                  <a:buClr>
+                    <a:srgbClr val="000000"/>
+                  </a:buClr>
+                  <a:buSzTx/>
+                  <a:buFont typeface="Arial"/>
+                  <a:buNone/>
+                  <a:tabLst/>
+                  <a:defRPr/>
+                </a:pPr>
+                <a:r>
+                  <a:rPr kumimoji="0" lang="en-US" sz="1600" b="1" i="0" u="none" strike="noStrike" kern="0" cap="none" spc="0" normalizeH="0" baseline="0" noProof="0" dirty="0">
+                    <a:ln>
+                      <a:noFill/>
+                    </a:ln>
+                    <a:solidFill>
+                      <a:srgbClr val="4BACC6">
+                        <a:lumMod val="50000"/>
+                      </a:srgbClr>
+                    </a:solidFill>
+                    <a:effectLst/>
+                    <a:uLnTx/>
+                    <a:uFillTx/>
+                    <a:latin typeface="Cambria" panose="02040503050406030204" pitchFamily="18" charset="0"/>
+                    <a:ea typeface="Cambria" panose="02040503050406030204" pitchFamily="18" charset="0"/>
+                    <a:cs typeface="Calibri" panose="020F0502020204030204" pitchFamily="34" charset="0"/>
+                    <a:sym typeface="Arial"/>
+                  </a:rPr>
+                  <a:t>Acknowledgements</a:t>
+                </a:r>
+              </a:p>
+              <a:p>
+                <a:pPr lvl="0">
+                  <a:defRPr/>
+                </a:pPr>
+                <a:r>
+                  <a:rPr lang="en-US" sz="1200" dirty="0">
+                    <a:solidFill>
+                      <a:schemeClr val="tx1"/>
+                    </a:solidFill>
+                    <a:latin typeface="Cambria" panose="02040503050406030204" pitchFamily="18" charset="0"/>
+                    <a:ea typeface="Cambria" panose="02040503050406030204" pitchFamily="18" charset="0"/>
+                    <a:cs typeface="Calibri" panose="020F0502020204030204" pitchFamily="34" charset="0"/>
+                  </a:rPr>
+                  <a:t>This work is supported by the Quantum Science Center (QSC), a National Quantum Information Science Research Center of the U.S. Department of Energy (DOE). This research used resources of the National Energy Research Scientific Computing Center, a DOE Office of Science User Facility. The code for simulations was built using the </a:t>
+                </a:r>
+                <a:r>
+                  <a:rPr lang="en-US" sz="1200" dirty="0" err="1">
+                    <a:solidFill>
+                      <a:schemeClr val="tx1"/>
+                    </a:solidFill>
+                    <a:latin typeface="Cambria" panose="02040503050406030204" pitchFamily="18" charset="0"/>
+                    <a:ea typeface="Cambria" panose="02040503050406030204" pitchFamily="18" charset="0"/>
+                    <a:cs typeface="Calibri" panose="020F0502020204030204" pitchFamily="34" charset="0"/>
+                  </a:rPr>
+                  <a:t>ITensors</a:t>
+                </a:r>
+                <a:r>
+                  <a:rPr lang="en-US" sz="1200" dirty="0">
+                    <a:solidFill>
+                      <a:schemeClr val="tx1"/>
+                    </a:solidFill>
+                    <a:latin typeface="Cambria" panose="02040503050406030204" pitchFamily="18" charset="0"/>
+                    <a:ea typeface="Cambria" panose="02040503050406030204" pitchFamily="18" charset="0"/>
+                    <a:cs typeface="Calibri" panose="020F0502020204030204" pitchFamily="34" charset="0"/>
+                  </a:rPr>
+                  <a:t> library.</a:t>
+                </a:r>
+              </a:p>
             </p:txBody>
           </p:sp>
         </mc:Choice>
@@ -16475,8 +16567,8 @@
             </p:nvSpPr>
             <p:spPr>
               <a:xfrm>
-                <a:off x="9737766" y="2542031"/>
-                <a:ext cx="4567936" cy="5719001"/>
+                <a:off x="9737766" y="2542030"/>
+                <a:ext cx="4567936" cy="7315200"/>
               </a:xfrm>
               <a:prstGeom prst="rect">
                 <a:avLst/>
@@ -16484,7 +16576,7 @@
               <a:blipFill>
                 <a:blip r:embed="rId10"/>
                 <a:stretch>
-                  <a:fillRect t="-425"/>
+                  <a:fillRect t="-173"/>
                 </a:stretch>
               </a:blipFill>
               <a:ln>
@@ -17550,8 +17642,8 @@
           </a:prstGeom>
         </p:spPr>
       </p:pic>
-      <mc:AlternateContent xmlns:mc="http://schemas.openxmlformats.org/markup-compatibility/2006" xmlns:a14="http://schemas.microsoft.com/office/drawing/2010/main">
-        <mc:Choice Requires="a14">
+      <mc:AlternateContent xmlns:mc="http://schemas.openxmlformats.org/markup-compatibility/2006">
+        <mc:Choice xmlns:a14="http://schemas.microsoft.com/office/drawing/2010/main" Requires="a14">
           <p:sp>
             <p:nvSpPr>
               <p:cNvPr id="47" name="TextBox 46">
@@ -17608,7 +17700,7 @@
             </p:txBody>
           </p:sp>
         </mc:Choice>
-        <mc:Fallback xmlns="">
+        <mc:Fallback>
           <p:sp>
             <p:nvSpPr>
               <p:cNvPr id="47" name="TextBox 46">
@@ -17634,7 +17726,7 @@
               <a:blipFill>
                 <a:blip r:embed="rId22"/>
                 <a:stretch>
-                  <a:fillRect b="-26190"/>
+                  <a:fillRect b="-22727"/>
                 </a:stretch>
               </a:blipFill>
             </p:spPr>
